--- a/Activities/Presentations/Lab 4.pptx
+++ b/Activities/Presentations/Lab 4.pptx
@@ -109,7 +109,18 @@
   </p:defaultTextStyle>
   <p:extLst>
     <p:ext uri="{EFAFB233-063F-42B5-8137-9DF3F51BA10A}">
-      <p15:sldGuideLst xmlns:p15="http://schemas.microsoft.com/office/powerpoint/2012/main" xmlns=""/>
+      <p15:sldGuideLst xmlns:p15="http://schemas.microsoft.com/office/powerpoint/2012/main">
+        <p15:guide id="1" orient="horz" pos="2160">
+          <p15:clr>
+            <a:srgbClr val="A4A3A4"/>
+          </p15:clr>
+        </p15:guide>
+        <p15:guide id="2" pos="3840">
+          <p15:clr>
+            <a:srgbClr val="A4A3A4"/>
+          </p15:clr>
+        </p15:guide>
+      </p15:sldGuideLst>
     </p:ext>
   </p:extLst>
 </p:presentation>
@@ -1819,7 +1830,7 @@
           <a:p>
             <a:fld id="{846CE7D5-CF57-46EF-B807-FDD0502418D4}" type="datetimeFigureOut">
               <a:rPr lang="en-US" smtClean="0"/>
-              <a:t>6/14/2020</a:t>
+              <a:t>8/1/2020</a:t>
             </a:fld>
             <a:endParaRPr lang="en-US"/>
           </a:p>
@@ -1989,7 +2000,7 @@
           <a:p>
             <a:fld id="{846CE7D5-CF57-46EF-B807-FDD0502418D4}" type="datetimeFigureOut">
               <a:rPr lang="en-US" smtClean="0"/>
-              <a:t>6/14/2020</a:t>
+              <a:t>8/1/2020</a:t>
             </a:fld>
             <a:endParaRPr lang="en-US"/>
           </a:p>
@@ -2169,7 +2180,7 @@
           <a:p>
             <a:fld id="{846CE7D5-CF57-46EF-B807-FDD0502418D4}" type="datetimeFigureOut">
               <a:rPr lang="en-US" smtClean="0"/>
-              <a:t>6/14/2020</a:t>
+              <a:t>8/1/2020</a:t>
             </a:fld>
             <a:endParaRPr lang="en-US"/>
           </a:p>
@@ -2339,7 +2350,7 @@
           <a:p>
             <a:fld id="{846CE7D5-CF57-46EF-B807-FDD0502418D4}" type="datetimeFigureOut">
               <a:rPr lang="en-US" smtClean="0"/>
-              <a:t>6/14/2020</a:t>
+              <a:t>8/1/2020</a:t>
             </a:fld>
             <a:endParaRPr lang="en-US"/>
           </a:p>
@@ -2585,7 +2596,7 @@
           <a:p>
             <a:fld id="{846CE7D5-CF57-46EF-B807-FDD0502418D4}" type="datetimeFigureOut">
               <a:rPr lang="en-US" smtClean="0"/>
-              <a:t>6/14/2020</a:t>
+              <a:t>8/1/2020</a:t>
             </a:fld>
             <a:endParaRPr lang="en-US"/>
           </a:p>
@@ -2817,7 +2828,7 @@
           <a:p>
             <a:fld id="{846CE7D5-CF57-46EF-B807-FDD0502418D4}" type="datetimeFigureOut">
               <a:rPr lang="en-US" smtClean="0"/>
-              <a:t>6/14/2020</a:t>
+              <a:t>8/1/2020</a:t>
             </a:fld>
             <a:endParaRPr lang="en-US"/>
           </a:p>
@@ -3184,7 +3195,7 @@
           <a:p>
             <a:fld id="{846CE7D5-CF57-46EF-B807-FDD0502418D4}" type="datetimeFigureOut">
               <a:rPr lang="en-US" smtClean="0"/>
-              <a:t>6/14/2020</a:t>
+              <a:t>8/1/2020</a:t>
             </a:fld>
             <a:endParaRPr lang="en-US"/>
           </a:p>
@@ -3302,7 +3313,7 @@
           <a:p>
             <a:fld id="{846CE7D5-CF57-46EF-B807-FDD0502418D4}" type="datetimeFigureOut">
               <a:rPr lang="en-US" smtClean="0"/>
-              <a:t>6/14/2020</a:t>
+              <a:t>8/1/2020</a:t>
             </a:fld>
             <a:endParaRPr lang="en-US"/>
           </a:p>
@@ -3397,7 +3408,7 @@
           <a:p>
             <a:fld id="{846CE7D5-CF57-46EF-B807-FDD0502418D4}" type="datetimeFigureOut">
               <a:rPr lang="en-US" smtClean="0"/>
-              <a:t>6/14/2020</a:t>
+              <a:t>8/1/2020</a:t>
             </a:fld>
             <a:endParaRPr lang="en-US"/>
           </a:p>
@@ -3674,7 +3685,7 @@
           <a:p>
             <a:fld id="{846CE7D5-CF57-46EF-B807-FDD0502418D4}" type="datetimeFigureOut">
               <a:rPr lang="en-US" smtClean="0"/>
-              <a:t>6/14/2020</a:t>
+              <a:t>8/1/2020</a:t>
             </a:fld>
             <a:endParaRPr lang="en-US"/>
           </a:p>
@@ -3931,7 +3942,7 @@
           <a:p>
             <a:fld id="{846CE7D5-CF57-46EF-B807-FDD0502418D4}" type="datetimeFigureOut">
               <a:rPr lang="en-US" smtClean="0"/>
-              <a:t>6/14/2020</a:t>
+              <a:t>8/1/2020</a:t>
             </a:fld>
             <a:endParaRPr lang="en-US"/>
           </a:p>
@@ -4144,7 +4155,7 @@
           <a:p>
             <a:fld id="{846CE7D5-CF57-46EF-B807-FDD0502418D4}" type="datetimeFigureOut">
               <a:rPr lang="en-US" smtClean="0"/>
-              <a:t>6/14/2020</a:t>
+              <a:t>8/1/2020</a:t>
             </a:fld>
             <a:endParaRPr lang="en-US"/>
           </a:p>
@@ -4561,50 +4572,65 @@
         </p:nvSpPr>
         <p:spPr/>
         <p:txBody>
-          <a:bodyPr/>
-          <a:lstStyle/>
-          <a:p>
-            <a:r>
-              <a:rPr lang="en-US" dirty="0">
-                <a:cs typeface="Calibri Light"/>
-              </a:rPr>
-              <a:t>Lab 4</a:t>
-            </a:r>
-            <a:endParaRPr lang="en-US" dirty="0"/>
-          </a:p>
-        </p:txBody>
-      </p:sp>
-      <p:sp>
-        <p:nvSpPr>
-          <p:cNvPr id="3" name="Subtitle 2"/>
-          <p:cNvSpPr>
-            <a:spLocks noGrp="1"/>
-          </p:cNvSpPr>
-          <p:nvPr>
-            <p:ph type="subTitle" idx="1"/>
-          </p:nvPr>
-        </p:nvSpPr>
-        <p:spPr/>
-        <p:txBody>
-          <a:bodyPr vert="horz" lIns="91440" tIns="45720" rIns="91440" bIns="45720" rtlCol="0" anchor="t">
+          <a:bodyPr>
             <a:normAutofit/>
           </a:bodyPr>
           <a:lstStyle/>
           <a:p>
             <a:r>
-              <a:rPr lang="en-US" dirty="0">
+              <a:rPr lang="en-US" sz="4000" dirty="0">
                 <a:cs typeface="Calibri"/>
               </a:rPr>
-              <a:t>Constant Gain Feedback Controller</a:t>
-            </a:r>
-          </a:p>
-          <a:p>
-            <a:r>
-              <a:rPr lang="en-US" dirty="0">
+              <a:t>Constant Gain Feedback Controller </a:t>
+            </a:r>
+            <a:br>
+              <a:rPr lang="en-US" sz="4000" dirty="0">
+                <a:cs typeface="Calibri"/>
+              </a:rPr>
+            </a:br>
+            <a:r>
+              <a:rPr lang="en-US" sz="4000" dirty="0">
+                <a:cs typeface="Calibri"/>
+              </a:rPr>
+              <a:t>and</a:t>
+            </a:r>
+            <a:br>
+              <a:rPr lang="en-US" sz="4000" dirty="0">
+                <a:cs typeface="Calibri"/>
+              </a:rPr>
+            </a:br>
+            <a:r>
+              <a:rPr lang="en-US" sz="4000" dirty="0">
                 <a:cs typeface="Calibri"/>
               </a:rPr>
               <a:t>On/Off Controller with Hysteresis</a:t>
             </a:r>
+            <a:endParaRPr lang="en-US" sz="4000" dirty="0"/>
+          </a:p>
+        </p:txBody>
+      </p:sp>
+      <p:sp>
+        <p:nvSpPr>
+          <p:cNvPr id="5" name="Subtitle 4">
+            <a:extLst>
+              <a:ext uri="{FF2B5EF4-FFF2-40B4-BE49-F238E27FC236}">
+                <a16:creationId xmlns:a16="http://schemas.microsoft.com/office/drawing/2014/main" id="{B853002B-8596-48B2-8F67-A612C58DAE14}"/>
+              </a:ext>
+            </a:extLst>
+          </p:cNvPr>
+          <p:cNvSpPr>
+            <a:spLocks noGrp="1"/>
+          </p:cNvSpPr>
+          <p:nvPr>
+            <p:ph type="subTitle" idx="1"/>
+          </p:nvPr>
+        </p:nvSpPr>
+        <p:spPr/>
+        <p:txBody>
+          <a:bodyPr/>
+          <a:lstStyle/>
+          <a:p>
+            <a:endParaRPr lang="en-US"/>
           </a:p>
         </p:txBody>
       </p:sp>
@@ -4643,7 +4669,7 @@
           <p:cNvPr id="2" name="Title 1">
             <a:extLst>
               <a:ext uri="{FF2B5EF4-FFF2-40B4-BE49-F238E27FC236}">
-                <a16:creationId xmlns:a16="http://schemas.microsoft.com/office/drawing/2014/main" xmlns="" id="{FE975A55-B48F-400D-A69E-C45DC677D7EC}"/>
+                <a16:creationId xmlns:a16="http://schemas.microsoft.com/office/drawing/2014/main" id="{FE975A55-B48F-400D-A69E-C45DC677D7EC}"/>
               </a:ext>
             </a:extLst>
           </p:cNvPr>
@@ -4676,7 +4702,7 @@
               <p14:cNvPr id="156" name="Ink 155">
                 <a:extLst>
                   <a:ext uri="{FF2B5EF4-FFF2-40B4-BE49-F238E27FC236}">
-                    <a16:creationId xmlns:a16="http://schemas.microsoft.com/office/drawing/2014/main" xmlns="" id="{6C0E935A-CEF3-4DF2-8020-99DA11C17E1B}"/>
+                    <a16:creationId xmlns:a16="http://schemas.microsoft.com/office/drawing/2014/main" id="{6C0E935A-CEF3-4DF2-8020-99DA11C17E1B}"/>
                   </a:ext>
                 </a:extLst>
               </p14:cNvPr>
@@ -4727,7 +4753,7 @@
               <p14:cNvPr id="157" name="Ink 156">
                 <a:extLst>
                   <a:ext uri="{FF2B5EF4-FFF2-40B4-BE49-F238E27FC236}">
-                    <a16:creationId xmlns:a16="http://schemas.microsoft.com/office/drawing/2014/main" xmlns="" id="{89F82934-AE12-40F6-AF51-4453224DD215}"/>
+                    <a16:creationId xmlns:a16="http://schemas.microsoft.com/office/drawing/2014/main" id="{89F82934-AE12-40F6-AF51-4453224DD215}"/>
                   </a:ext>
                 </a:extLst>
               </p14:cNvPr>
@@ -4776,7 +4802,7 @@
           <p:cNvPr id="152" name="Picture 4" descr="A picture containing screenshot&#10;&#10;Description generated with very high confidence">
             <a:extLst>
               <a:ext uri="{FF2B5EF4-FFF2-40B4-BE49-F238E27FC236}">
-                <a16:creationId xmlns:a16="http://schemas.microsoft.com/office/drawing/2014/main" xmlns="" id="{FDE3C1D2-6937-4964-ACFB-194E83FE6778}"/>
+                <a16:creationId xmlns:a16="http://schemas.microsoft.com/office/drawing/2014/main" id="{FDE3C1D2-6937-4964-ACFB-194E83FE6778}"/>
               </a:ext>
             </a:extLst>
           </p:cNvPr>
@@ -4835,7 +4861,7 @@
           <p:cNvPr id="2" name="Title 1">
             <a:extLst>
               <a:ext uri="{FF2B5EF4-FFF2-40B4-BE49-F238E27FC236}">
-                <a16:creationId xmlns:a16="http://schemas.microsoft.com/office/drawing/2014/main" xmlns="" id="{1CDAE30B-A6BD-430D-A50C-CE05E3472A69}"/>
+                <a16:creationId xmlns:a16="http://schemas.microsoft.com/office/drawing/2014/main" id="{1CDAE30B-A6BD-430D-A50C-CE05E3472A69}"/>
               </a:ext>
             </a:extLst>
           </p:cNvPr>
@@ -4865,7 +4891,7 @@
           <p:cNvPr id="4" name="Picture 4" descr="A close up of a clock&#10;&#10;Description generated with high confidence">
             <a:extLst>
               <a:ext uri="{FF2B5EF4-FFF2-40B4-BE49-F238E27FC236}">
-                <a16:creationId xmlns:a16="http://schemas.microsoft.com/office/drawing/2014/main" xmlns="" id="{FF30B1D1-33D6-40E9-8992-AA73D5485D28}"/>
+                <a16:creationId xmlns:a16="http://schemas.microsoft.com/office/drawing/2014/main" id="{FF30B1D1-33D6-40E9-8992-AA73D5485D28}"/>
               </a:ext>
             </a:extLst>
           </p:cNvPr>
@@ -4894,7 +4920,7 @@
           <p:cNvPr id="5" name="Picture 5" descr="A picture containing game&#10;&#10;Description generated with very high confidence">
             <a:extLst>
               <a:ext uri="{FF2B5EF4-FFF2-40B4-BE49-F238E27FC236}">
-                <a16:creationId xmlns:a16="http://schemas.microsoft.com/office/drawing/2014/main" xmlns="" id="{C7237500-5A3F-4C31-8FA0-EB2CA11B55F0}"/>
+                <a16:creationId xmlns:a16="http://schemas.microsoft.com/office/drawing/2014/main" id="{C7237500-5A3F-4C31-8FA0-EB2CA11B55F0}"/>
               </a:ext>
             </a:extLst>
           </p:cNvPr>
@@ -4954,7 +4980,7 @@
           <p:cNvPr id="2" name="Title 1">
             <a:extLst>
               <a:ext uri="{FF2B5EF4-FFF2-40B4-BE49-F238E27FC236}">
-                <a16:creationId xmlns:a16="http://schemas.microsoft.com/office/drawing/2014/main" xmlns="" id="{F88535F4-D629-4769-9360-A8AF67A2D613}"/>
+                <a16:creationId xmlns:a16="http://schemas.microsoft.com/office/drawing/2014/main" id="{F88535F4-D629-4769-9360-A8AF67A2D613}"/>
               </a:ext>
             </a:extLst>
           </p:cNvPr>
@@ -4979,7 +5005,7 @@
           <p:cNvPr id="3" name="Content Placeholder 2">
             <a:extLst>
               <a:ext uri="{FF2B5EF4-FFF2-40B4-BE49-F238E27FC236}">
-                <a16:creationId xmlns:a16="http://schemas.microsoft.com/office/drawing/2014/main" xmlns="" id="{EF277510-6A2B-424D-AFBA-B55812E0064F}"/>
+                <a16:creationId xmlns:a16="http://schemas.microsoft.com/office/drawing/2014/main" id="{EF277510-6A2B-424D-AFBA-B55812E0064F}"/>
               </a:ext>
             </a:extLst>
           </p:cNvPr>
@@ -5267,7 +5293,7 @@
   <a:extraClrSchemeLst/>
   <a:extLst>
     <a:ext uri="{05A4C25C-085E-4340-85A3-A5531E510DB2}">
-      <thm15:themeFamily xmlns:thm15="http://schemas.microsoft.com/office/thememl/2012/main" xmlns="" name="Office Theme" id="{62F939B6-93AF-4DB8-9C6B-D6C7DFDC589F}" vid="{4A3C46E8-61CC-4603-A589-7422A47A8E4A}"/>
+      <thm15:themeFamily xmlns:thm15="http://schemas.microsoft.com/office/thememl/2012/main" name="Office Theme" id="{62F939B6-93AF-4DB8-9C6B-D6C7DFDC589F}" vid="{4A3C46E8-61CC-4603-A589-7422A47A8E4A}"/>
     </a:ext>
   </a:extLst>
 </a:theme>
